--- a/SLIDES/thesis_discussion_deck.pptx
+++ b/SLIDES/thesis_discussion_deck.pptx
@@ -1454,7 +1454,7 @@
           <a:lstStyle/>
           <a:p>
             <a:r>
-              <a:t>La tesi si basa su due sistemi complementari. Uno è generativo: propone nuovi candidati polimerici. L'altro è predittivo: dato un polimero e una molecola target, stima quanto di quella molecola il polimero riesce ad adsorbire. A collegarli c'è un filtro basato sulla conoscenza di dominio. Questi due sistemi formano una pipeline, in grado, dato in input una molecola che vogliamo "catturare" (ed iperparametri configurabili), di proporre in output una serie di polimeri che il modello predice essere dei buoni candidati.</a:t>
+              <a:t>La tesi si basa su due sistemi complementari. Uno è generativo: propone nuovi candidati polimerici. L'altro è predittivo: dato un polimero e una molecola target, stima quanto di quella molecola il polimero riesce ad adsorbire. Questi due sistemi formano una pipeline, in grado, dato in input una molecola che vogliamo "catturare" (ed iperparametri configurabili), di proporre in output una serie di polimeri che il modello predice essere dei buoni candidati.</a:t>
             </a:r>
           </a:p>
           <a:p/>
@@ -1465,7 +1465,7 @@
           </a:p>
           <a:p>
             <a:r>
-              <a:t>- Produrre il diagramma a due riquadri con freccia di confluenza.</a:t>
+              <a:t>- In presentazione: 1° click → carosello polimeri, 2° click → pipeline predittiva, 3° click → slide successiva.</a:t>
             </a:r>
           </a:p>
         </p:txBody>
@@ -7579,7 +7579,7 @@
         <p:spPr>
           <a:xfrm>
             <a:off x="1739900" y="1971675"/>
-            <a:ext cx="9394825" cy="4000500"/>
+            <a:ext cx="9394825" cy="1200150"/>
           </a:xfrm>
         </p:spPr>
         <p:txBody>
@@ -7605,17 +7605,6 @@
                 <a:latin typeface="Optima"/>
               </a:rPr>
               <a:t>Modello Predittivo → capacità di adsorbimento stimata</a:t>
-            </a:r>
-          </a:p>
-          <a:p>
-            <a:r>
-              <a:rPr sz="2800" b="0">
-                <a:solidFill>
-                  <a:srgbClr val="000000"/>
-                </a:solidFill>
-                <a:latin typeface="Optima"/>
-              </a:rPr>
-              <a:t>Filtro di dominio a collegarli → un'unica pipeline</a:t>
             </a:r>
           </a:p>
         </p:txBody>
@@ -7679,11 +7668,201 @@
           </a:fontRef>
         </p:style>
       </p:cxnSp>
+      <p:pic>
+        <p:nvPicPr>
+          <p:cNvPr id="6" name="polymer_carousel.mp4">
+            <a:hlinkClick r:id="" action="ppaction://media"/>
+          </p:cNvPr>
+          <p:cNvPicPr>
+            <a:picLocks noChangeAspect="1"/>
+          </p:cNvPicPr>
+          <p:nvPr>
+            <a:videoFile r:link="rId4"/>
+            <p:extLst>
+              <p:ext uri="{DAA4B4D4-6D71-4841-9C94-3DE7FCFB9230}">
+                <p14:media xmlns:p14="http://schemas.microsoft.com/office/powerpoint/2010/main" r:embed="rId3"/>
+              </p:ext>
+            </p:extLst>
+          </p:nvPr>
+        </p:nvPicPr>
+        <p:blipFill>
+          <a:blip r:embed="rId5"/>
+          <a:stretch>
+            <a:fillRect/>
+          </a:stretch>
+        </p:blipFill>
+        <p:spPr>
+          <a:xfrm>
+            <a:off x="1739900" y="3363010"/>
+            <a:ext cx="4583112" cy="2578000"/>
+          </a:xfrm>
+          <a:prstGeom prst="rect">
+            <a:avLst/>
+          </a:prstGeom>
+        </p:spPr>
+      </p:pic>
+      <p:pic>
+        <p:nvPicPr>
+          <p:cNvPr id="7" name="prediction_pipeline.mp4">
+            <a:hlinkClick r:id="" action="ppaction://media"/>
+          </p:cNvPr>
+          <p:cNvPicPr>
+            <a:picLocks noChangeAspect="1"/>
+          </p:cNvPicPr>
+          <p:nvPr>
+            <a:videoFile r:link="rId7"/>
+            <p:extLst>
+              <p:ext uri="{DAA4B4D4-6D71-4841-9C94-3DE7FCFB9230}">
+                <p14:media xmlns:p14="http://schemas.microsoft.com/office/powerpoint/2010/main" r:embed="rId6"/>
+              </p:ext>
+            </p:extLst>
+          </p:nvPr>
+        </p:nvPicPr>
+        <p:blipFill>
+          <a:blip r:embed="rId8"/>
+          <a:stretch>
+            <a:fillRect/>
+          </a:stretch>
+        </p:blipFill>
+        <p:spPr>
+          <a:xfrm>
+            <a:off x="6551612" y="3363010"/>
+            <a:ext cx="4583112" cy="2578000"/>
+          </a:xfrm>
+          <a:prstGeom prst="rect">
+            <a:avLst/>
+          </a:prstGeom>
+        </p:spPr>
+      </p:pic>
     </p:spTree>
   </p:cSld>
   <p:clrMapOvr>
     <a:masterClrMapping/>
   </p:clrMapOvr>
+  <p:timing>
+    <p:tnLst>
+      <p:par>
+        <p:cTn id="1" dur="indefinite" restart="never" nodeType="tmRoot">
+          <p:childTnLst>
+            <p:seq concurrent="1" nextAc="seek">
+              <p:cTn id="2" dur="indefinite" nodeType="mainSeq">
+                <p:childTnLst>
+                  <p:par>
+                    <p:cTn id="3" fill="hold">
+                      <p:stCondLst>
+                        <p:cond delay="indefinite"/>
+                      </p:stCondLst>
+                      <p:childTnLst>
+                        <p:par>
+                          <p:cTn id="4" fill="hold">
+                            <p:stCondLst>
+                              <p:cond delay="0"/>
+                            </p:stCondLst>
+                            <p:childTnLst>
+                              <p:par>
+                                <p:cTn id="5" presetID="1" presetClass="mediacall" presetSubtype="0" fill="hold" nodeType="clickEffect">
+                                  <p:stCondLst>
+                                    <p:cond delay="0"/>
+                                  </p:stCondLst>
+                                  <p:childTnLst>
+                                    <p:cmd type="call" cmd="playFrom(0.0)">
+                                      <p:cBhvr>
+                                        <p:cTn id="6" dur="11000" fill="hold"/>
+                                        <p:tgtEl>
+                                          <p:spTgt spid="6"/>
+                                        </p:tgtEl>
+                                      </p:cBhvr>
+                                    </p:cmd>
+                                  </p:childTnLst>
+                                </p:cTn>
+                              </p:par>
+                            </p:childTnLst>
+                          </p:cTn>
+                        </p:par>
+                      </p:childTnLst>
+                    </p:cTn>
+                  </p:par>
+                  <p:par>
+                    <p:cTn id="7" fill="hold">
+                      <p:stCondLst>
+                        <p:cond delay="indefinite"/>
+                      </p:stCondLst>
+                      <p:childTnLst>
+                        <p:par>
+                          <p:cTn id="8" fill="hold">
+                            <p:stCondLst>
+                              <p:cond delay="0"/>
+                            </p:stCondLst>
+                            <p:childTnLst>
+                              <p:par>
+                                <p:cTn id="9" presetID="1" presetClass="mediacall" presetSubtype="0" fill="hold" nodeType="clickEffect">
+                                  <p:stCondLst>
+                                    <p:cond delay="0"/>
+                                  </p:stCondLst>
+                                  <p:childTnLst>
+                                    <p:cmd type="call" cmd="playFrom(0.0)">
+                                      <p:cBhvr>
+                                        <p:cTn id="10" dur="9700" fill="hold"/>
+                                        <p:tgtEl>
+                                          <p:spTgt spid="7"/>
+                                        </p:tgtEl>
+                                      </p:cBhvr>
+                                    </p:cmd>
+                                  </p:childTnLst>
+                                </p:cTn>
+                              </p:par>
+                            </p:childTnLst>
+                          </p:cTn>
+                        </p:par>
+                      </p:childTnLst>
+                    </p:cTn>
+                  </p:par>
+                </p:childTnLst>
+              </p:cTn>
+              <p:prevCondLst>
+                <p:cond evt="onPrev" delay="0">
+                  <p:tgtEl>
+                    <p:sldTgt/>
+                  </p:tgtEl>
+                </p:cond>
+              </p:prevCondLst>
+              <p:nextCondLst>
+                <p:cond evt="onNext" delay="0">
+                  <p:tgtEl>
+                    <p:sldTgt/>
+                  </p:tgtEl>
+                </p:cond>
+              </p:nextCondLst>
+            </p:seq>
+            <p:video>
+              <p:cMediaNode vol="80000">
+                <p:cTn id="11" fill="hold" display="0">
+                  <p:stCondLst>
+                    <p:cond delay="indefinite"/>
+                  </p:stCondLst>
+                </p:cTn>
+                <p:tgtEl>
+                  <p:spTgt spid="6"/>
+                </p:tgtEl>
+              </p:cMediaNode>
+            </p:video>
+            <p:video>
+              <p:cMediaNode vol="80000">
+                <p:cTn id="12" fill="hold" display="0">
+                  <p:stCondLst>
+                    <p:cond delay="indefinite"/>
+                  </p:stCondLst>
+                </p:cTn>
+                <p:tgtEl>
+                  <p:spTgt spid="7"/>
+                </p:tgtEl>
+              </p:cMediaNode>
+            </p:video>
+          </p:childTnLst>
+        </p:cTn>
+      </p:par>
+    </p:tnLst>
+  </p:timing>
 </p:sld>
 </file>
 
